--- a/Plataforma-Web-E-Commerce-MVC.pptx
+++ b/Plataforma-Web-E-Commerce-MVC.pptx
@@ -5753,30 +5753,6 @@
           </a:p>
         </p:txBody>
       </p:sp>
-      <p:pic>
-        <p:nvPicPr>
-          <p:cNvPr id="3" name="Image 0" descr="preencoded.png"/>
-          <p:cNvPicPr>
-            <a:picLocks noChangeAspect="1"/>
-          </p:cNvPicPr>
-          <p:nvPr/>
-        </p:nvPicPr>
-        <p:blipFill>
-          <a:blip r:embed="rId3"/>
-          <a:stretch>
-            <a:fillRect/>
-          </a:stretch>
-        </p:blipFill>
-        <p:spPr>
-          <a:xfrm>
-            <a:off x="698086" y="1854101"/>
-            <a:ext cx="6868048" cy="3891955"/>
-          </a:xfrm>
-          <a:prstGeom prst="rect">
-            <a:avLst/>
-          </a:prstGeom>
-        </p:spPr>
-      </p:pic>
       <p:sp>
         <p:nvSpPr>
           <p:cNvPr id="4" name="Text 1"/>
@@ -5828,10 +5804,10 @@
           <p:nvPr/>
         </p:nvPicPr>
         <p:blipFill>
-          <a:blip r:embed="rId4">
+          <a:blip r:embed="rId3">
             <a:extLst>
               <a:ext uri="{96DAC541-7B7A-43D3-8B79-37D633B846F1}">
-                <asvg:svgBlip xmlns:asvg="http://schemas.microsoft.com/office/drawing/2016/SVG/main" r:embed="rId5"/>
+                <asvg:svgBlip xmlns:asvg="http://schemas.microsoft.com/office/drawing/2016/SVG/main" r:embed="rId4"/>
               </a:ext>
             </a:extLst>
           </a:blip>
@@ -5971,10 +5947,10 @@
           <p:nvPr/>
         </p:nvPicPr>
         <p:blipFill>
-          <a:blip r:embed="rId4">
+          <a:blip r:embed="rId3">
             <a:extLst>
               <a:ext uri="{96DAC541-7B7A-43D3-8B79-37D633B846F1}">
-                <asvg:svgBlip xmlns:asvg="http://schemas.microsoft.com/office/drawing/2016/SVG/main" r:embed="rId5"/>
+                <asvg:svgBlip xmlns:asvg="http://schemas.microsoft.com/office/drawing/2016/SVG/main" r:embed="rId4"/>
               </a:ext>
             </a:extLst>
           </a:blip>
@@ -6089,10 +6065,10 @@
           <p:nvPr/>
         </p:nvPicPr>
         <p:blipFill>
-          <a:blip r:embed="rId4">
+          <a:blip r:embed="rId3">
             <a:extLst>
               <a:ext uri="{96DAC541-7B7A-43D3-8B79-37D633B846F1}">
-                <asvg:svgBlip xmlns:asvg="http://schemas.microsoft.com/office/drawing/2016/SVG/main" r:embed="rId5"/>
+                <asvg:svgBlip xmlns:asvg="http://schemas.microsoft.com/office/drawing/2016/SVG/main" r:embed="rId4"/>
               </a:ext>
             </a:extLst>
           </a:blip>
@@ -6198,6 +6174,36 @@
           </a:p>
         </p:txBody>
       </p:sp>
+      <p:pic>
+        <p:nvPicPr>
+          <p:cNvPr id="15" name="Imagen 14">
+            <a:extLst>
+              <a:ext uri="{FF2B5EF4-FFF2-40B4-BE49-F238E27FC236}">
+                <a16:creationId xmlns:a16="http://schemas.microsoft.com/office/drawing/2014/main" id="{DE48A162-2DF6-403A-B56E-9079D812A56D}"/>
+              </a:ext>
+            </a:extLst>
+          </p:cNvPr>
+          <p:cNvPicPr>
+            <a:picLocks noChangeAspect="1"/>
+          </p:cNvPicPr>
+          <p:nvPr/>
+        </p:nvPicPr>
+        <p:blipFill>
+          <a:blip r:embed="rId5"/>
+          <a:stretch>
+            <a:fillRect/>
+          </a:stretch>
+        </p:blipFill>
+        <p:spPr>
+          <a:xfrm>
+            <a:off x="698086" y="2248316"/>
+            <a:ext cx="6755247" cy="2608817"/>
+          </a:xfrm>
+          <a:prstGeom prst="rect">
+            <a:avLst/>
+          </a:prstGeom>
+        </p:spPr>
+      </p:pic>
     </p:spTree>
   </p:cSld>
   <p:clrMapOvr>
